--- a/docs/一拖多设计.pptx
+++ b/docs/一拖多设计.pptx
@@ -4120,16 +4120,40 @@
           </a:p>
         </p:txBody>
       </p:sp>
-      <p:sp>
-        <p:nvSpPr>
-          <p:cNvPr id="6" name="TextBox 5"/>
+      <p:pic>
+        <p:nvPicPr>
+          <p:cNvPr id="6" name="Picture 5" descr="icon-bom.png"/>
+          <p:cNvPicPr>
+            <a:picLocks noChangeAspect="1"/>
+          </p:cNvPicPr>
+          <p:nvPr/>
+        </p:nvPicPr>
+        <p:blipFill>
+          <a:blip r:embed="rId2"/>
+          <a:stretch>
+            <a:fillRect/>
+          </a:stretch>
+        </p:blipFill>
+        <p:spPr>
+          <a:xfrm>
+            <a:off x="566928" y="1892808"/>
+            <a:ext cx="274320" cy="274320"/>
+          </a:xfrm>
+          <a:prstGeom prst="rect">
+            <a:avLst/>
+          </a:prstGeom>
+        </p:spPr>
+      </p:pic>
+      <p:sp>
+        <p:nvSpPr>
+          <p:cNvPr id="7" name="TextBox 6"/>
           <p:cNvSpPr txBox="1"/>
           <p:nvPr/>
         </p:nvSpPr>
         <p:spPr>
           <a:xfrm>
-            <a:off x="566928" y="1920240"/>
-            <a:ext cx="1133856" cy="475488"/>
+            <a:off x="950976" y="1920240"/>
+            <a:ext cx="914400" cy="237744"/>
           </a:xfrm>
           <a:prstGeom prst="rect">
             <a:avLst/>
@@ -4148,7 +4172,7 @@
               </a:spcAft>
             </a:pPr>
             <a:r>
-              <a:rPr sz="1200" b="1">
+              <a:rPr sz="1150" b="1">
                 <a:solidFill>
                   <a:srgbClr val="002FA7"/>
                 </a:solidFill>
@@ -4163,14 +4187,14 @@
       </p:sp>
       <p:sp>
         <p:nvSpPr>
-          <p:cNvPr id="7" name="TextBox 6"/>
+          <p:cNvPr id="8" name="TextBox 7"/>
           <p:cNvSpPr txBox="1"/>
           <p:nvPr/>
         </p:nvSpPr>
         <p:spPr>
           <a:xfrm>
-            <a:off x="1792224" y="1920240"/>
-            <a:ext cx="3895344" cy="475488"/>
+            <a:off x="1920240" y="1920240"/>
+            <a:ext cx="3767328" cy="237744"/>
           </a:xfrm>
           <a:prstGeom prst="rect">
             <a:avLst/>
@@ -4189,7 +4213,7 @@
               </a:spcAft>
             </a:pPr>
             <a:r>
-              <a:rPr sz="1200" b="0">
+              <a:rPr sz="1150" b="0">
                 <a:solidFill>
                   <a:srgbClr val="1A1A1A"/>
                 </a:solidFill>
@@ -4197,20 +4221,20 @@
                 <a:ea typeface="微软雅黑"/>
                 <a:cs typeface="微软雅黑"/>
               </a:rPr>
-              <a:t>多台测试台相同的设备清单，由 BOM 注册工位实例</a:t>
-            </a:r>
-          </a:p>
-        </p:txBody>
-      </p:sp>
-      <p:sp>
-        <p:nvSpPr>
-          <p:cNvPr id="8" name="Rectangle 7"/>
+              <a:t>多台测试台共用同一份设备清单，按清单注册工位实例</a:t>
+            </a:r>
+          </a:p>
+        </p:txBody>
+      </p:sp>
+      <p:sp>
+        <p:nvSpPr>
+          <p:cNvPr id="9" name="Rectangle 8"/>
           <p:cNvSpPr/>
           <p:nvPr/>
         </p:nvSpPr>
         <p:spPr>
           <a:xfrm>
-            <a:off x="566928" y="2359152"/>
+            <a:off x="566928" y="2286000"/>
             <a:ext cx="5120640" cy="6350"/>
           </a:xfrm>
           <a:prstGeom prst="rect">
@@ -4232,16 +4256,40 @@
           </a:p>
         </p:txBody>
       </p:sp>
-      <p:sp>
-        <p:nvSpPr>
-          <p:cNvPr id="9" name="TextBox 8"/>
+      <p:pic>
+        <p:nvPicPr>
+          <p:cNvPr id="10" name="Picture 9" descr="icon-bench.png"/>
+          <p:cNvPicPr>
+            <a:picLocks noChangeAspect="1"/>
+          </p:cNvPicPr>
+          <p:nvPr/>
+        </p:nvPicPr>
+        <p:blipFill>
+          <a:blip r:embed="rId3"/>
+          <a:stretch>
+            <a:fillRect/>
+          </a:stretch>
+        </p:blipFill>
+        <p:spPr>
+          <a:xfrm>
+            <a:off x="566928" y="2350008"/>
+            <a:ext cx="274320" cy="274320"/>
+          </a:xfrm>
+          <a:prstGeom prst="rect">
+            <a:avLst/>
+          </a:prstGeom>
+        </p:spPr>
+      </p:pic>
+      <p:sp>
+        <p:nvSpPr>
+          <p:cNvPr id="11" name="TextBox 10"/>
           <p:cNvSpPr txBox="1"/>
           <p:nvPr/>
         </p:nvSpPr>
         <p:spPr>
           <a:xfrm>
-            <a:off x="566928" y="2468880"/>
-            <a:ext cx="1133856" cy="475488"/>
+            <a:off x="950976" y="2377440"/>
+            <a:ext cx="914400" cy="237744"/>
           </a:xfrm>
           <a:prstGeom prst="rect">
             <a:avLst/>
@@ -4260,7 +4308,7 @@
               </a:spcAft>
             </a:pPr>
             <a:r>
-              <a:rPr sz="1200" b="1">
+              <a:rPr sz="1150" b="1">
                 <a:solidFill>
                   <a:srgbClr val="002FA7"/>
                 </a:solidFill>
@@ -4275,14 +4323,14 @@
       </p:sp>
       <p:sp>
         <p:nvSpPr>
-          <p:cNvPr id="10" name="TextBox 9"/>
+          <p:cNvPr id="12" name="TextBox 11"/>
           <p:cNvSpPr txBox="1"/>
           <p:nvPr/>
         </p:nvSpPr>
         <p:spPr>
           <a:xfrm>
-            <a:off x="1792224" y="2468880"/>
-            <a:ext cx="3895344" cy="475488"/>
+            <a:off x="1920240" y="2377440"/>
+            <a:ext cx="3767328" cy="237744"/>
           </a:xfrm>
           <a:prstGeom prst="rect">
             <a:avLst/>
@@ -4301,7 +4349,7 @@
               </a:spcAft>
             </a:pPr>
             <a:r>
-              <a:rPr sz="1200" b="0">
+              <a:rPr sz="1150" b="0">
                 <a:solidFill>
                   <a:srgbClr val="1A1A1A"/>
                 </a:solidFill>
@@ -4316,13 +4364,13 @@
       </p:sp>
       <p:sp>
         <p:nvSpPr>
-          <p:cNvPr id="11" name="Rectangle 10"/>
+          <p:cNvPr id="13" name="Rectangle 12"/>
           <p:cNvSpPr/>
           <p:nvPr/>
         </p:nvSpPr>
         <p:spPr>
           <a:xfrm>
-            <a:off x="566928" y="2907792"/>
+            <a:off x="566928" y="2743200"/>
             <a:ext cx="5120640" cy="6350"/>
           </a:xfrm>
           <a:prstGeom prst="rect">
@@ -4344,16 +4392,40 @@
           </a:p>
         </p:txBody>
       </p:sp>
-      <p:sp>
-        <p:nvSpPr>
-          <p:cNvPr id="12" name="TextBox 11"/>
+      <p:pic>
+        <p:nvPicPr>
+          <p:cNvPr id="14" name="Picture 13" descr="icon-channel.png"/>
+          <p:cNvPicPr>
+            <a:picLocks noChangeAspect="1"/>
+          </p:cNvPicPr>
+          <p:nvPr/>
+        </p:nvPicPr>
+        <p:blipFill>
+          <a:blip r:embed="rId4"/>
+          <a:stretch>
+            <a:fillRect/>
+          </a:stretch>
+        </p:blipFill>
+        <p:spPr>
+          <a:xfrm>
+            <a:off x="566928" y="2807208"/>
+            <a:ext cx="274320" cy="274320"/>
+          </a:xfrm>
+          <a:prstGeom prst="rect">
+            <a:avLst/>
+          </a:prstGeom>
+        </p:spPr>
+      </p:pic>
+      <p:sp>
+        <p:nvSpPr>
+          <p:cNvPr id="15" name="TextBox 14"/>
           <p:cNvSpPr txBox="1"/>
           <p:nvPr/>
         </p:nvSpPr>
         <p:spPr>
           <a:xfrm>
-            <a:off x="566928" y="3017520"/>
-            <a:ext cx="1133856" cy="475488"/>
+            <a:off x="950976" y="2834640"/>
+            <a:ext cx="914400" cy="237744"/>
           </a:xfrm>
           <a:prstGeom prst="rect">
             <a:avLst/>
@@ -4372,7 +4444,7 @@
               </a:spcAft>
             </a:pPr>
             <a:r>
-              <a:rPr sz="1200" b="1">
+              <a:rPr sz="1150" b="1">
                 <a:solidFill>
                   <a:srgbClr val="002FA7"/>
                 </a:solidFill>
@@ -4387,14 +4459,14 @@
       </p:sp>
       <p:sp>
         <p:nvSpPr>
-          <p:cNvPr id="13" name="TextBox 12"/>
+          <p:cNvPr id="16" name="TextBox 15"/>
           <p:cNvSpPr txBox="1"/>
           <p:nvPr/>
         </p:nvSpPr>
         <p:spPr>
           <a:xfrm>
-            <a:off x="1792224" y="3017520"/>
-            <a:ext cx="3895344" cy="475488"/>
+            <a:off x="1920240" y="2834640"/>
+            <a:ext cx="3767328" cy="237744"/>
           </a:xfrm>
           <a:prstGeom prst="rect">
             <a:avLst/>
@@ -4413,7 +4485,7 @@
               </a:spcAft>
             </a:pPr>
             <a:r>
-              <a:rPr sz="1200" b="0">
+              <a:rPr sz="1150" b="0">
                 <a:solidFill>
                   <a:srgbClr val="1A1A1A"/>
                 </a:solidFill>
@@ -4421,20 +4493,20 @@
                 <a:ea typeface="微软雅黑"/>
                 <a:cs typeface="微软雅黑"/>
               </a:rPr>
-              <a:t>各测试台不同的设备通道配置，存放在装备属性配置模块的 DB</a:t>
-            </a:r>
-          </a:p>
-        </p:txBody>
-      </p:sp>
-      <p:sp>
-        <p:nvSpPr>
-          <p:cNvPr id="14" name="Rectangle 13"/>
+              <a:t>各台不同的通道配置写入装备属性配置模块的 DB</a:t>
+            </a:r>
+          </a:p>
+        </p:txBody>
+      </p:sp>
+      <p:sp>
+        <p:nvSpPr>
+          <p:cNvPr id="17" name="Rectangle 16"/>
           <p:cNvSpPr/>
           <p:nvPr/>
         </p:nvSpPr>
         <p:spPr>
           <a:xfrm>
-            <a:off x="566928" y="3456432"/>
+            <a:off x="566928" y="3200400"/>
             <a:ext cx="5120640" cy="6350"/>
           </a:xfrm>
           <a:prstGeom prst="rect">
@@ -4456,16 +4528,40 @@
           </a:p>
         </p:txBody>
       </p:sp>
-      <p:sp>
-        <p:nvSpPr>
-          <p:cNvPr id="15" name="TextBox 14"/>
+      <p:pic>
+        <p:nvPicPr>
+          <p:cNvPr id="18" name="Picture 17" descr="icon-params.png"/>
+          <p:cNvPicPr>
+            <a:picLocks noChangeAspect="1"/>
+          </p:cNvPicPr>
+          <p:nvPr/>
+        </p:nvPicPr>
+        <p:blipFill>
+          <a:blip r:embed="rId5"/>
+          <a:stretch>
+            <a:fillRect/>
+          </a:stretch>
+        </p:blipFill>
+        <p:spPr>
+          <a:xfrm>
+            <a:off x="566928" y="3264408"/>
+            <a:ext cx="274320" cy="274320"/>
+          </a:xfrm>
+          <a:prstGeom prst="rect">
+            <a:avLst/>
+          </a:prstGeom>
+        </p:spPr>
+      </p:pic>
+      <p:sp>
+        <p:nvSpPr>
+          <p:cNvPr id="19" name="TextBox 18"/>
           <p:cNvSpPr txBox="1"/>
           <p:nvPr/>
         </p:nvSpPr>
         <p:spPr>
           <a:xfrm>
-            <a:off x="566928" y="3566160"/>
-            <a:ext cx="1133856" cy="475488"/>
+            <a:off x="950976" y="3291840"/>
+            <a:ext cx="914400" cy="237744"/>
           </a:xfrm>
           <a:prstGeom prst="rect">
             <a:avLst/>
@@ -4484,7 +4580,7 @@
               </a:spcAft>
             </a:pPr>
             <a:r>
-              <a:rPr sz="1200" b="1">
+              <a:rPr sz="1150" b="1">
                 <a:solidFill>
                   <a:srgbClr val="002FA7"/>
                 </a:solidFill>
@@ -4499,14 +4595,14 @@
       </p:sp>
       <p:sp>
         <p:nvSpPr>
-          <p:cNvPr id="16" name="TextBox 15"/>
+          <p:cNvPr id="20" name="TextBox 19"/>
           <p:cNvSpPr txBox="1"/>
           <p:nvPr/>
         </p:nvSpPr>
         <p:spPr>
           <a:xfrm>
-            <a:off x="1792224" y="3566160"/>
-            <a:ext cx="3895344" cy="475488"/>
+            <a:off x="1920240" y="3291840"/>
+            <a:ext cx="3767328" cy="237744"/>
           </a:xfrm>
           <a:prstGeom prst="rect">
             <a:avLst/>
@@ -4525,7 +4621,7 @@
               </a:spcAft>
             </a:pPr>
             <a:r>
-              <a:rPr sz="1200" b="0">
+              <a:rPr sz="1150" b="0">
                 <a:solidFill>
                   <a:srgbClr val="1A1A1A"/>
                 </a:solidFill>
@@ -4533,20 +4629,20 @@
                 <a:ea typeface="微软雅黑"/>
                 <a:cs typeface="微软雅黑"/>
               </a:rPr>
-              <a:t>测试执行时由 pytest 把通道配置等参数传递给测试用例</a:t>
-            </a:r>
-          </a:p>
-        </p:txBody>
-      </p:sp>
-      <p:sp>
-        <p:nvSpPr>
-          <p:cNvPr id="17" name="Rectangle 16"/>
+              <a:t>执行时通过 pytest 将通道配置等参数传给测试用例</a:t>
+            </a:r>
+          </a:p>
+        </p:txBody>
+      </p:sp>
+      <p:sp>
+        <p:nvSpPr>
+          <p:cNvPr id="21" name="Rectangle 20"/>
           <p:cNvSpPr/>
           <p:nvPr/>
         </p:nvSpPr>
         <p:spPr>
           <a:xfrm>
-            <a:off x="566928" y="4005072"/>
+            <a:off x="566928" y="3657600"/>
             <a:ext cx="5120640" cy="6350"/>
           </a:xfrm>
           <a:prstGeom prst="rect">
@@ -4568,16 +4664,40 @@
           </a:p>
         </p:txBody>
       </p:sp>
-      <p:sp>
-        <p:nvSpPr>
-          <p:cNvPr id="18" name="TextBox 17"/>
+      <p:pic>
+        <p:nvPicPr>
+          <p:cNvPr id="22" name="Picture 21" descr="icon-grpc.png"/>
+          <p:cNvPicPr>
+            <a:picLocks noChangeAspect="1"/>
+          </p:cNvPicPr>
+          <p:nvPr/>
+        </p:nvPicPr>
+        <p:blipFill>
+          <a:blip r:embed="rId6"/>
+          <a:stretch>
+            <a:fillRect/>
+          </a:stretch>
+        </p:blipFill>
+        <p:spPr>
+          <a:xfrm>
+            <a:off x="566928" y="3721608"/>
+            <a:ext cx="274320" cy="274320"/>
+          </a:xfrm>
+          <a:prstGeom prst="rect">
+            <a:avLst/>
+          </a:prstGeom>
+        </p:spPr>
+      </p:pic>
+      <p:sp>
+        <p:nvSpPr>
+          <p:cNvPr id="23" name="TextBox 22"/>
           <p:cNvSpPr txBox="1"/>
           <p:nvPr/>
         </p:nvSpPr>
         <p:spPr>
           <a:xfrm>
-            <a:off x="566928" y="4114800"/>
-            <a:ext cx="1133856" cy="475488"/>
+            <a:off x="950976" y="3749039"/>
+            <a:ext cx="914400" cy="237744"/>
           </a:xfrm>
           <a:prstGeom prst="rect">
             <a:avLst/>
@@ -4596,7 +4716,7 @@
               </a:spcAft>
             </a:pPr>
             <a:r>
-              <a:rPr sz="1200" b="1">
+              <a:rPr sz="1150" b="1">
                 <a:solidFill>
                   <a:srgbClr val="002FA7"/>
                 </a:solidFill>
@@ -4611,14 +4731,14 @@
       </p:sp>
       <p:sp>
         <p:nvSpPr>
-          <p:cNvPr id="19" name="TextBox 18"/>
+          <p:cNvPr id="24" name="TextBox 23"/>
           <p:cNvSpPr txBox="1"/>
           <p:nvPr/>
         </p:nvSpPr>
         <p:spPr>
           <a:xfrm>
-            <a:off x="1792224" y="4114800"/>
-            <a:ext cx="3895344" cy="475488"/>
+            <a:off x="1920240" y="3749039"/>
+            <a:ext cx="3767328" cy="237744"/>
           </a:xfrm>
           <a:prstGeom prst="rect">
             <a:avLst/>
@@ -4637,7 +4757,7 @@
               </a:spcAft>
             </a:pPr>
             <a:r>
-              <a:rPr sz="1200" b="0">
+              <a:rPr sz="1150" b="0">
                 <a:solidFill>
                   <a:srgbClr val="1A1A1A"/>
                 </a:solidFill>
@@ -4652,13 +4772,13 @@
       </p:sp>
       <p:sp>
         <p:nvSpPr>
-          <p:cNvPr id="20" name="Rectangle 19"/>
+          <p:cNvPr id="25" name="Rectangle 24"/>
           <p:cNvSpPr/>
           <p:nvPr/>
         </p:nvSpPr>
         <p:spPr>
           <a:xfrm>
-            <a:off x="566928" y="4553712"/>
+            <a:off x="566928" y="4114800"/>
             <a:ext cx="5120640" cy="6350"/>
           </a:xfrm>
           <a:prstGeom prst="rect">
@@ -4680,16 +4800,40 @@
           </a:p>
         </p:txBody>
       </p:sp>
-      <p:sp>
-        <p:nvSpPr>
-          <p:cNvPr id="21" name="TextBox 20"/>
+      <p:pic>
+        <p:nvPicPr>
+          <p:cNvPr id="26" name="Picture 25" descr="icon-hub.png"/>
+          <p:cNvPicPr>
+            <a:picLocks noChangeAspect="1"/>
+          </p:cNvPicPr>
+          <p:nvPr/>
+        </p:nvPicPr>
+        <p:blipFill>
+          <a:blip r:embed="rId7"/>
+          <a:stretch>
+            <a:fillRect/>
+          </a:stretch>
+        </p:blipFill>
+        <p:spPr>
+          <a:xfrm>
+            <a:off x="566928" y="4178808"/>
+            <a:ext cx="274320" cy="274320"/>
+          </a:xfrm>
+          <a:prstGeom prst="rect">
+            <a:avLst/>
+          </a:prstGeom>
+        </p:spPr>
+      </p:pic>
+      <p:sp>
+        <p:nvSpPr>
+          <p:cNvPr id="27" name="TextBox 26"/>
           <p:cNvSpPr txBox="1"/>
           <p:nvPr/>
         </p:nvSpPr>
         <p:spPr>
           <a:xfrm>
-            <a:off x="566928" y="4663440"/>
-            <a:ext cx="1133856" cy="475488"/>
+            <a:off x="950976" y="4206240"/>
+            <a:ext cx="914400" cy="237744"/>
           </a:xfrm>
           <a:prstGeom prst="rect">
             <a:avLst/>
@@ -4708,7 +4852,7 @@
               </a:spcAft>
             </a:pPr>
             <a:r>
-              <a:rPr sz="1200" b="1">
+              <a:rPr sz="1150" b="1">
                 <a:solidFill>
                   <a:srgbClr val="002FA7"/>
                 </a:solidFill>
@@ -4723,14 +4867,14 @@
       </p:sp>
       <p:sp>
         <p:nvSpPr>
-          <p:cNvPr id="22" name="TextBox 21"/>
+          <p:cNvPr id="28" name="TextBox 27"/>
           <p:cNvSpPr txBox="1"/>
           <p:nvPr/>
         </p:nvSpPr>
         <p:spPr>
           <a:xfrm>
-            <a:off x="1792224" y="4663440"/>
-            <a:ext cx="3895344" cy="475488"/>
+            <a:off x="1920240" y="4206240"/>
+            <a:ext cx="3767328" cy="237744"/>
           </a:xfrm>
           <a:prstGeom prst="rect">
             <a:avLst/>
@@ -4749,7 +4893,7 @@
               </a:spcAft>
             </a:pPr>
             <a:r>
-              <a:rPr sz="1200" b="0">
+              <a:rPr sz="1150" b="0">
                 <a:solidFill>
                   <a:srgbClr val="1A1A1A"/>
                 </a:solidFill>
@@ -4757,20 +4901,20 @@
                 <a:ea typeface="微软雅黑"/>
                 <a:cs typeface="微软雅黑"/>
               </a:rPr>
-              <a:t>各工控机下发的命令都交给同一个 GPB 上的设备管理服务</a:t>
-            </a:r>
-          </a:p>
-        </p:txBody>
-      </p:sp>
-      <p:sp>
-        <p:nvSpPr>
-          <p:cNvPr id="23" name="Rectangle 22"/>
+              <a:t>各工控机的命令都发给同一个 GPB 设备管理服务</a:t>
+            </a:r>
+          </a:p>
+        </p:txBody>
+      </p:sp>
+      <p:sp>
+        <p:nvSpPr>
+          <p:cNvPr id="29" name="Rectangle 28"/>
           <p:cNvSpPr/>
           <p:nvPr/>
         </p:nvSpPr>
         <p:spPr>
           <a:xfrm>
-            <a:off x="566928" y="5102351"/>
+            <a:off x="566928" y="4572000"/>
             <a:ext cx="5120640" cy="6350"/>
           </a:xfrm>
           <a:prstGeom prst="rect">
@@ -4794,13 +4938,13 @@
       </p:sp>
       <p:sp>
         <p:nvSpPr>
-          <p:cNvPr id="24" name="TextBox 23"/>
+          <p:cNvPr id="30" name="TextBox 29"/>
           <p:cNvSpPr txBox="1"/>
           <p:nvPr/>
         </p:nvSpPr>
         <p:spPr>
           <a:xfrm>
-            <a:off x="566928" y="5303520"/>
+            <a:off x="566928" y="4681728"/>
             <a:ext cx="5120640" cy="256032"/>
           </a:xfrm>
           <a:prstGeom prst="rect">
@@ -4835,14 +4979,100 @@
       </p:sp>
       <p:sp>
         <p:nvSpPr>
-          <p:cNvPr id="25" name="Rectangle 24"/>
+          <p:cNvPr id="31" name="TextBox 30"/>
+          <p:cNvSpPr txBox="1"/>
+          <p:nvPr/>
+        </p:nvSpPr>
+        <p:spPr>
+          <a:xfrm>
+            <a:off x="566928" y="4992624"/>
+            <a:ext cx="804672" cy="219456"/>
+          </a:xfrm>
+          <a:prstGeom prst="rect">
+            <a:avLst/>
+          </a:prstGeom>
+          <a:noFill/>
+        </p:spPr>
+        <p:txBody>
+          <a:bodyPr wrap="square" lIns="0" rIns="0" tIns="0" bIns="0" anchor="t">
+            <a:spAutoFit/>
+          </a:bodyPr>
+          <a:lstStyle/>
+          <a:p>
+            <a:pPr algn="l">
+              <a:spcAft>
+                <a:spcPts val="0"/>
+              </a:spcAft>
+            </a:pPr>
+            <a:r>
+              <a:rPr sz="1000" b="1">
+                <a:solidFill>
+                  <a:srgbClr val="002FA7"/>
+                </a:solidFill>
+                <a:latin typeface="微软雅黑"/>
+                <a:ea typeface="微软雅黑"/>
+                <a:cs typeface="微软雅黑"/>
+              </a:rPr>
+              <a:t>对比项</a:t>
+            </a:r>
+          </a:p>
+        </p:txBody>
+      </p:sp>
+      <p:sp>
+        <p:nvSpPr>
+          <p:cNvPr id="32" name="Rectangle 31"/>
           <p:cNvSpPr/>
           <p:nvPr/>
         </p:nvSpPr>
         <p:spPr>
           <a:xfrm>
-            <a:off x="566928" y="5614416"/>
-            <a:ext cx="5120640" cy="1408176"/>
+            <a:off x="1408176" y="4956048"/>
+            <a:ext cx="1773936" cy="237744"/>
+          </a:xfrm>
+          <a:prstGeom prst="rect">
+            <a:avLst/>
+          </a:prstGeom>
+          <a:solidFill>
+            <a:srgbClr val="EFEDEA"/>
+          </a:solidFill>
+          <a:ln>
+            <a:noFill/>
+          </a:ln>
+          <a:effectLst/>
+        </p:spPr>
+        <p:txBody>
+          <a:bodyPr rtlCol="0" anchor="ctr" wrap="square" lIns="36576" rIns="36576" tIns="36576" bIns="36576"/>
+          <a:lstStyle/>
+          <a:p>
+            <a:pPr algn="ctr">
+              <a:spcAft>
+                <a:spcPts val="0"/>
+              </a:spcAft>
+            </a:pPr>
+            <a:r>
+              <a:rPr sz="1000" b="1">
+                <a:solidFill>
+                  <a:srgbClr val="1A1A1A"/>
+                </a:solidFill>
+                <a:latin typeface="微软雅黑"/>
+                <a:ea typeface="微软雅黑"/>
+                <a:cs typeface="微软雅黑"/>
+              </a:rPr>
+              <a:t>当前方案</a:t>
+            </a:r>
+          </a:p>
+        </p:txBody>
+      </p:sp>
+      <p:sp>
+        <p:nvSpPr>
+          <p:cNvPr id="33" name="Rectangle 32"/>
+          <p:cNvSpPr/>
+          <p:nvPr/>
+        </p:nvSpPr>
+        <p:spPr>
+          <a:xfrm>
+            <a:off x="3218688" y="4956048"/>
+            <a:ext cx="2468880" cy="237744"/>
           </a:xfrm>
           <a:prstGeom prst="rect">
             <a:avLst/>
@@ -4856,44 +5086,49 @@
           <a:effectLst/>
         </p:spPr>
         <p:txBody>
-          <a:bodyPr rtlCol="0" anchor="ctr" wrap="square" tIns="36576" bIns="36576"/>
-          <a:lstStyle/>
-          <a:p>
-            <a:pPr algn="l">
+          <a:bodyPr rtlCol="0" anchor="ctr" wrap="square" lIns="36576" rIns="36576" tIns="36576" bIns="36576"/>
+          <a:lstStyle/>
+          <a:p>
+            <a:pPr algn="ctr">
               <a:spcAft>
-                <a:spcPts val="600"/>
+                <a:spcPts val="0"/>
               </a:spcAft>
             </a:pPr>
             <a:r>
-              <a:rPr sz="1200" b="0">
-                <a:solidFill>
-                  <a:srgbClr val="1A1A1A"/>
+              <a:rPr sz="1000" b="1">
+                <a:solidFill>
+                  <a:srgbClr val="002FA7"/>
                 </a:solidFill>
                 <a:latin typeface="微软雅黑"/>
                 <a:ea typeface="微软雅黑"/>
                 <a:cs typeface="微软雅黑"/>
               </a:rPr>
-              <a:t>不再依赖 GPB 上的 .sh 脚本与电子电气的内部工具</a:t>
-            </a:r>
-          </a:p>
-          <a:p>
-            <a:pPr algn="l">
-              <a:spcAft>
-                <a:spcPts val="600"/>
-              </a:spcAft>
-            </a:pPr>
-            <a:r>
-              <a:rPr sz="1200" b="0">
-                <a:solidFill>
-                  <a:srgbClr val="1A1A1A"/>
-                </a:solidFill>
-                <a:latin typeface="微软雅黑"/>
-                <a:ea typeface="微软雅黑"/>
-                <a:cs typeface="微软雅黑"/>
-              </a:rPr>
-              <a:t>工位实例由设备 BOM 注册，通道差异由 DB 与用例参数承担</a:t>
-            </a:r>
-          </a:p>
+              <a:t>正式方案（ATE Runner）</a:t>
+            </a:r>
+          </a:p>
+        </p:txBody>
+      </p:sp>
+      <p:sp>
+        <p:nvSpPr>
+          <p:cNvPr id="34" name="TextBox 33"/>
+          <p:cNvSpPr txBox="1"/>
+          <p:nvPr/>
+        </p:nvSpPr>
+        <p:spPr>
+          <a:xfrm>
+            <a:off x="566928" y="5266944"/>
+            <a:ext cx="804672" cy="219456"/>
+          </a:xfrm>
+          <a:prstGeom prst="rect">
+            <a:avLst/>
+          </a:prstGeom>
+          <a:noFill/>
+        </p:spPr>
+        <p:txBody>
+          <a:bodyPr wrap="square" lIns="0" rIns="0" tIns="0" bIns="0" anchor="t">
+            <a:spAutoFit/>
+          </a:bodyPr>
+          <a:lstStyle/>
           <a:p>
             <a:pPr algn="l">
               <a:spcAft>
@@ -4901,29 +5136,29 @@
               </a:spcAft>
             </a:pPr>
             <a:r>
-              <a:rPr sz="1200" b="0">
-                <a:solidFill>
-                  <a:srgbClr val="1A1A1A"/>
+              <a:rPr sz="1000" b="1">
+                <a:solidFill>
+                  <a:srgbClr val="002FA7"/>
                 </a:solidFill>
                 <a:latin typeface="微软雅黑"/>
                 <a:ea typeface="微软雅黑"/>
                 <a:cs typeface="微软雅黑"/>
               </a:rPr>
-              <a:t>多个工位实例同时在线，命令汇聚到同一个设备管理服务</a:t>
-            </a:r>
-          </a:p>
-        </p:txBody>
-      </p:sp>
-      <p:sp>
-        <p:nvSpPr>
-          <p:cNvPr id="26" name="TextBox 25"/>
+              <a:t>执行主体</a:t>
+            </a:r>
+          </a:p>
+        </p:txBody>
+      </p:sp>
+      <p:sp>
+        <p:nvSpPr>
+          <p:cNvPr id="35" name="TextBox 34"/>
           <p:cNvSpPr txBox="1"/>
           <p:nvPr/>
         </p:nvSpPr>
         <p:spPr>
           <a:xfrm>
-            <a:off x="5870448" y="1664208"/>
-            <a:ext cx="5751576" cy="256032"/>
+            <a:off x="1408176" y="5266944"/>
+            <a:ext cx="1773936" cy="219456"/>
           </a:xfrm>
           <a:prstGeom prst="rect">
             <a:avLst/>
@@ -4942,53 +5177,648 @@
               </a:spcAft>
             </a:pPr>
             <a:r>
-              <a:rPr sz="1350" b="1">
-                <a:solidFill>
-                  <a:srgbClr val="002FA7"/>
+              <a:rPr sz="1000" b="0">
+                <a:solidFill>
+                  <a:srgbClr val="1A1A1A"/>
                 </a:solidFill>
                 <a:latin typeface="微软雅黑"/>
                 <a:ea typeface="微软雅黑"/>
                 <a:cs typeface="微软雅黑"/>
               </a:rPr>
-              <a:t>一拖多架构</a:t>
+              <a:t>GPB 上的 .sh 脚本</a:t>
+            </a:r>
+          </a:p>
+        </p:txBody>
+      </p:sp>
+      <p:sp>
+        <p:nvSpPr>
+          <p:cNvPr id="36" name="TextBox 35"/>
+          <p:cNvSpPr txBox="1"/>
+          <p:nvPr/>
+        </p:nvSpPr>
+        <p:spPr>
+          <a:xfrm>
+            <a:off x="3218688" y="5266944"/>
+            <a:ext cx="2468880" cy="219456"/>
+          </a:xfrm>
+          <a:prstGeom prst="rect">
+            <a:avLst/>
+          </a:prstGeom>
+          <a:noFill/>
+        </p:spPr>
+        <p:txBody>
+          <a:bodyPr wrap="square" lIns="0" rIns="0" tIns="0" bIns="0" anchor="t">
+            <a:spAutoFit/>
+          </a:bodyPr>
+          <a:lstStyle/>
+          <a:p>
+            <a:pPr algn="l">
+              <a:spcAft>
+                <a:spcPts val="0"/>
+              </a:spcAft>
+            </a:pPr>
+            <a:r>
+              <a:rPr sz="1000" b="1">
+                <a:solidFill>
+                  <a:srgbClr val="002FA7"/>
+                </a:solidFill>
+                <a:latin typeface="微软雅黑"/>
+                <a:ea typeface="微软雅黑"/>
+                <a:cs typeface="微软雅黑"/>
+              </a:rPr>
+              <a:t>工位实例中的 pytest 用例</a:t>
+            </a:r>
+          </a:p>
+        </p:txBody>
+      </p:sp>
+      <p:sp>
+        <p:nvSpPr>
+          <p:cNvPr id="37" name="Rectangle 36"/>
+          <p:cNvSpPr/>
+          <p:nvPr/>
+        </p:nvSpPr>
+        <p:spPr>
+          <a:xfrm>
+            <a:off x="566928" y="5495544"/>
+            <a:ext cx="5120640" cy="6350"/>
+          </a:xfrm>
+          <a:prstGeom prst="rect">
+            <a:avLst/>
+          </a:prstGeom>
+          <a:solidFill>
+            <a:srgbClr val="D9D5CF"/>
+          </a:solidFill>
+          <a:ln>
+            <a:noFill/>
+          </a:ln>
+          <a:effectLst/>
+        </p:spPr>
+        <p:txBody>
+          <a:bodyPr rtlCol="0" anchor="ctr"/>
+          <a:lstStyle/>
+          <a:p>
+            <a:pPr algn="ctr"/>
+          </a:p>
+        </p:txBody>
+      </p:sp>
+      <p:sp>
+        <p:nvSpPr>
+          <p:cNvPr id="38" name="TextBox 37"/>
+          <p:cNvSpPr txBox="1"/>
+          <p:nvPr/>
+        </p:nvSpPr>
+        <p:spPr>
+          <a:xfrm>
+            <a:off x="566928" y="5522976"/>
+            <a:ext cx="804672" cy="219456"/>
+          </a:xfrm>
+          <a:prstGeom prst="rect">
+            <a:avLst/>
+          </a:prstGeom>
+          <a:noFill/>
+        </p:spPr>
+        <p:txBody>
+          <a:bodyPr wrap="square" lIns="0" rIns="0" tIns="0" bIns="0" anchor="t">
+            <a:spAutoFit/>
+          </a:bodyPr>
+          <a:lstStyle/>
+          <a:p>
+            <a:pPr algn="l">
+              <a:spcAft>
+                <a:spcPts val="0"/>
+              </a:spcAft>
+            </a:pPr>
+            <a:r>
+              <a:rPr sz="1000" b="1">
+                <a:solidFill>
+                  <a:srgbClr val="002FA7"/>
+                </a:solidFill>
+                <a:latin typeface="微软雅黑"/>
+                <a:ea typeface="微软雅黑"/>
+                <a:cs typeface="微软雅黑"/>
+              </a:rPr>
+              <a:t>通道差异</a:t>
+            </a:r>
+          </a:p>
+        </p:txBody>
+      </p:sp>
+      <p:sp>
+        <p:nvSpPr>
+          <p:cNvPr id="39" name="TextBox 38"/>
+          <p:cNvSpPr txBox="1"/>
+          <p:nvPr/>
+        </p:nvSpPr>
+        <p:spPr>
+          <a:xfrm>
+            <a:off x="1408176" y="5522976"/>
+            <a:ext cx="1773936" cy="219456"/>
+          </a:xfrm>
+          <a:prstGeom prst="rect">
+            <a:avLst/>
+          </a:prstGeom>
+          <a:noFill/>
+        </p:spPr>
+        <p:txBody>
+          <a:bodyPr wrap="square" lIns="0" rIns="0" tIns="0" bIns="0" anchor="t">
+            <a:spAutoFit/>
+          </a:bodyPr>
+          <a:lstStyle/>
+          <a:p>
+            <a:pPr algn="l">
+              <a:spcAft>
+                <a:spcPts val="0"/>
+              </a:spcAft>
+            </a:pPr>
+            <a:r>
+              <a:rPr sz="1000" b="0">
+                <a:solidFill>
+                  <a:srgbClr val="1A1A1A"/>
+                </a:solidFill>
+                <a:latin typeface="微软雅黑"/>
+                <a:ea typeface="微软雅黑"/>
+                <a:cs typeface="微软雅黑"/>
+              </a:rPr>
+              <a:t>集中在脚本与 GPB</a:t>
+            </a:r>
+          </a:p>
+        </p:txBody>
+      </p:sp>
+      <p:sp>
+        <p:nvSpPr>
+          <p:cNvPr id="40" name="TextBox 39"/>
+          <p:cNvSpPr txBox="1"/>
+          <p:nvPr/>
+        </p:nvSpPr>
+        <p:spPr>
+          <a:xfrm>
+            <a:off x="3218688" y="5522976"/>
+            <a:ext cx="2468880" cy="219456"/>
+          </a:xfrm>
+          <a:prstGeom prst="rect">
+            <a:avLst/>
+          </a:prstGeom>
+          <a:noFill/>
+        </p:spPr>
+        <p:txBody>
+          <a:bodyPr wrap="square" lIns="0" rIns="0" tIns="0" bIns="0" anchor="t">
+            <a:spAutoFit/>
+          </a:bodyPr>
+          <a:lstStyle/>
+          <a:p>
+            <a:pPr algn="l">
+              <a:spcAft>
+                <a:spcPts val="0"/>
+              </a:spcAft>
+            </a:pPr>
+            <a:r>
+              <a:rPr sz="1000" b="1">
+                <a:solidFill>
+                  <a:srgbClr val="002FA7"/>
+                </a:solidFill>
+                <a:latin typeface="微软雅黑"/>
+                <a:ea typeface="微软雅黑"/>
+                <a:cs typeface="微软雅黑"/>
+              </a:rPr>
+              <a:t>写入装备属性配置模块 DB</a:t>
+            </a:r>
+          </a:p>
+        </p:txBody>
+      </p:sp>
+      <p:sp>
+        <p:nvSpPr>
+          <p:cNvPr id="41" name="Rectangle 40"/>
+          <p:cNvSpPr/>
+          <p:nvPr/>
+        </p:nvSpPr>
+        <p:spPr>
+          <a:xfrm>
+            <a:off x="566928" y="5751576"/>
+            <a:ext cx="5120640" cy="6350"/>
+          </a:xfrm>
+          <a:prstGeom prst="rect">
+            <a:avLst/>
+          </a:prstGeom>
+          <a:solidFill>
+            <a:srgbClr val="D9D5CF"/>
+          </a:solidFill>
+          <a:ln>
+            <a:noFill/>
+          </a:ln>
+          <a:effectLst/>
+        </p:spPr>
+        <p:txBody>
+          <a:bodyPr rtlCol="0" anchor="ctr"/>
+          <a:lstStyle/>
+          <a:p>
+            <a:pPr algn="ctr"/>
+          </a:p>
+        </p:txBody>
+      </p:sp>
+      <p:sp>
+        <p:nvSpPr>
+          <p:cNvPr id="42" name="TextBox 41"/>
+          <p:cNvSpPr txBox="1"/>
+          <p:nvPr/>
+        </p:nvSpPr>
+        <p:spPr>
+          <a:xfrm>
+            <a:off x="566928" y="5779008"/>
+            <a:ext cx="804672" cy="219456"/>
+          </a:xfrm>
+          <a:prstGeom prst="rect">
+            <a:avLst/>
+          </a:prstGeom>
+          <a:noFill/>
+        </p:spPr>
+        <p:txBody>
+          <a:bodyPr wrap="square" lIns="0" rIns="0" tIns="0" bIns="0" anchor="t">
+            <a:spAutoFit/>
+          </a:bodyPr>
+          <a:lstStyle/>
+          <a:p>
+            <a:pPr algn="l">
+              <a:spcAft>
+                <a:spcPts val="0"/>
+              </a:spcAft>
+            </a:pPr>
+            <a:r>
+              <a:rPr sz="1000" b="1">
+                <a:solidFill>
+                  <a:srgbClr val="002FA7"/>
+                </a:solidFill>
+                <a:latin typeface="微软雅黑"/>
+                <a:ea typeface="微软雅黑"/>
+                <a:cs typeface="微软雅黑"/>
+              </a:rPr>
+              <a:t>多台支撑</a:t>
+            </a:r>
+          </a:p>
+        </p:txBody>
+      </p:sp>
+      <p:sp>
+        <p:nvSpPr>
+          <p:cNvPr id="43" name="TextBox 42"/>
+          <p:cNvSpPr txBox="1"/>
+          <p:nvPr/>
+        </p:nvSpPr>
+        <p:spPr>
+          <a:xfrm>
+            <a:off x="1408176" y="5779008"/>
+            <a:ext cx="1773936" cy="219456"/>
+          </a:xfrm>
+          <a:prstGeom prst="rect">
+            <a:avLst/>
+          </a:prstGeom>
+          <a:noFill/>
+        </p:spPr>
+        <p:txBody>
+          <a:bodyPr wrap="square" lIns="0" rIns="0" tIns="0" bIns="0" anchor="t">
+            <a:spAutoFit/>
+          </a:bodyPr>
+          <a:lstStyle/>
+          <a:p>
+            <a:pPr algn="l">
+              <a:spcAft>
+                <a:spcPts val="0"/>
+              </a:spcAft>
+            </a:pPr>
+            <a:r>
+              <a:rPr sz="1000" b="0">
+                <a:solidFill>
+                  <a:srgbClr val="1A1A1A"/>
+                </a:solidFill>
+                <a:latin typeface="微软雅黑"/>
+                <a:ea typeface="微软雅黑"/>
+                <a:cs typeface="微软雅黑"/>
+              </a:rPr>
+              <a:t>分时下发、进程串行</a:t>
+            </a:r>
+          </a:p>
+        </p:txBody>
+      </p:sp>
+      <p:sp>
+        <p:nvSpPr>
+          <p:cNvPr id="44" name="TextBox 43"/>
+          <p:cNvSpPr txBox="1"/>
+          <p:nvPr/>
+        </p:nvSpPr>
+        <p:spPr>
+          <a:xfrm>
+            <a:off x="3218688" y="5779008"/>
+            <a:ext cx="2468880" cy="219456"/>
+          </a:xfrm>
+          <a:prstGeom prst="rect">
+            <a:avLst/>
+          </a:prstGeom>
+          <a:noFill/>
+        </p:spPr>
+        <p:txBody>
+          <a:bodyPr wrap="square" lIns="0" rIns="0" tIns="0" bIns="0" anchor="t">
+            <a:spAutoFit/>
+          </a:bodyPr>
+          <a:lstStyle/>
+          <a:p>
+            <a:pPr algn="l">
+              <a:spcAft>
+                <a:spcPts val="0"/>
+              </a:spcAft>
+            </a:pPr>
+            <a:r>
+              <a:rPr sz="1000" b="1">
+                <a:solidFill>
+                  <a:srgbClr val="002FA7"/>
+                </a:solidFill>
+                <a:latin typeface="微软雅黑"/>
+                <a:ea typeface="微软雅黑"/>
+                <a:cs typeface="微软雅黑"/>
+              </a:rPr>
+              <a:t>多工位实例同时在线</a:t>
+            </a:r>
+          </a:p>
+        </p:txBody>
+      </p:sp>
+      <p:sp>
+        <p:nvSpPr>
+          <p:cNvPr id="45" name="Rectangle 44"/>
+          <p:cNvSpPr/>
+          <p:nvPr/>
+        </p:nvSpPr>
+        <p:spPr>
+          <a:xfrm>
+            <a:off x="566928" y="6007608"/>
+            <a:ext cx="5120640" cy="6350"/>
+          </a:xfrm>
+          <a:prstGeom prst="rect">
+            <a:avLst/>
+          </a:prstGeom>
+          <a:solidFill>
+            <a:srgbClr val="D9D5CF"/>
+          </a:solidFill>
+          <a:ln>
+            <a:noFill/>
+          </a:ln>
+          <a:effectLst/>
+        </p:spPr>
+        <p:txBody>
+          <a:bodyPr rtlCol="0" anchor="ctr"/>
+          <a:lstStyle/>
+          <a:p>
+            <a:pPr algn="ctr"/>
+          </a:p>
+        </p:txBody>
+      </p:sp>
+      <p:sp>
+        <p:nvSpPr>
+          <p:cNvPr id="46" name="TextBox 45"/>
+          <p:cNvSpPr txBox="1"/>
+          <p:nvPr/>
+        </p:nvSpPr>
+        <p:spPr>
+          <a:xfrm>
+            <a:off x="566928" y="6035040"/>
+            <a:ext cx="804672" cy="219456"/>
+          </a:xfrm>
+          <a:prstGeom prst="rect">
+            <a:avLst/>
+          </a:prstGeom>
+          <a:noFill/>
+        </p:spPr>
+        <p:txBody>
+          <a:bodyPr wrap="square" lIns="0" rIns="0" tIns="0" bIns="0" anchor="t">
+            <a:spAutoFit/>
+          </a:bodyPr>
+          <a:lstStyle/>
+          <a:p>
+            <a:pPr algn="l">
+              <a:spcAft>
+                <a:spcPts val="0"/>
+              </a:spcAft>
+            </a:pPr>
+            <a:r>
+              <a:rPr sz="1000" b="1">
+                <a:solidFill>
+                  <a:srgbClr val="002FA7"/>
+                </a:solidFill>
+                <a:latin typeface="微软雅黑"/>
+                <a:ea typeface="微软雅黑"/>
+                <a:cs typeface="微软雅黑"/>
+              </a:rPr>
+              <a:t>对外发布</a:t>
+            </a:r>
+          </a:p>
+        </p:txBody>
+      </p:sp>
+      <p:sp>
+        <p:nvSpPr>
+          <p:cNvPr id="47" name="TextBox 46"/>
+          <p:cNvSpPr txBox="1"/>
+          <p:nvPr/>
+        </p:nvSpPr>
+        <p:spPr>
+          <a:xfrm>
+            <a:off x="1408176" y="6035040"/>
+            <a:ext cx="1773936" cy="219456"/>
+          </a:xfrm>
+          <a:prstGeom prst="rect">
+            <a:avLst/>
+          </a:prstGeom>
+          <a:noFill/>
+        </p:spPr>
+        <p:txBody>
+          <a:bodyPr wrap="square" lIns="0" rIns="0" tIns="0" bIns="0" anchor="t">
+            <a:spAutoFit/>
+          </a:bodyPr>
+          <a:lstStyle/>
+          <a:p>
+            <a:pPr algn="l">
+              <a:spcAft>
+                <a:spcPts val="0"/>
+              </a:spcAft>
+            </a:pPr>
+            <a:r>
+              <a:rPr sz="1000" b="0">
+                <a:solidFill>
+                  <a:srgbClr val="1A1A1A"/>
+                </a:solidFill>
+                <a:latin typeface="微软雅黑"/>
+                <a:ea typeface="微软雅黑"/>
+                <a:cs typeface="微软雅黑"/>
+              </a:rPr>
+              <a:t>内部工具随软件发布</a:t>
+            </a:r>
+          </a:p>
+        </p:txBody>
+      </p:sp>
+      <p:sp>
+        <p:nvSpPr>
+          <p:cNvPr id="48" name="TextBox 47"/>
+          <p:cNvSpPr txBox="1"/>
+          <p:nvPr/>
+        </p:nvSpPr>
+        <p:spPr>
+          <a:xfrm>
+            <a:off x="3218688" y="6035040"/>
+            <a:ext cx="2468880" cy="219456"/>
+          </a:xfrm>
+          <a:prstGeom prst="rect">
+            <a:avLst/>
+          </a:prstGeom>
+          <a:noFill/>
+        </p:spPr>
+        <p:txBody>
+          <a:bodyPr wrap="square" lIns="0" rIns="0" tIns="0" bIns="0" anchor="t">
+            <a:spAutoFit/>
+          </a:bodyPr>
+          <a:lstStyle/>
+          <a:p>
+            <a:pPr algn="l">
+              <a:spcAft>
+                <a:spcPts val="0"/>
+              </a:spcAft>
+            </a:pPr>
+            <a:r>
+              <a:rPr sz="1000" b="1">
+                <a:solidFill>
+                  <a:srgbClr val="002FA7"/>
+                </a:solidFill>
+                <a:latin typeface="微软雅黑"/>
+                <a:ea typeface="微软雅黑"/>
+                <a:cs typeface="微软雅黑"/>
+              </a:rPr>
+              <a:t>只发布 Runner 与驱动</a:t>
+            </a:r>
+          </a:p>
+        </p:txBody>
+      </p:sp>
+      <p:sp>
+        <p:nvSpPr>
+          <p:cNvPr id="49" name="Rectangle 48"/>
+          <p:cNvSpPr/>
+          <p:nvPr/>
+        </p:nvSpPr>
+        <p:spPr>
+          <a:xfrm>
+            <a:off x="566928" y="6263640"/>
+            <a:ext cx="5120640" cy="6350"/>
+          </a:xfrm>
+          <a:prstGeom prst="rect">
+            <a:avLst/>
+          </a:prstGeom>
+          <a:solidFill>
+            <a:srgbClr val="D9D5CF"/>
+          </a:solidFill>
+          <a:ln>
+            <a:noFill/>
+          </a:ln>
+          <a:effectLst/>
+        </p:spPr>
+        <p:txBody>
+          <a:bodyPr rtlCol="0" anchor="ctr"/>
+          <a:lstStyle/>
+          <a:p>
+            <a:pPr algn="ctr"/>
+          </a:p>
+        </p:txBody>
+      </p:sp>
+      <p:sp>
+        <p:nvSpPr>
+          <p:cNvPr id="50" name="TextBox 49"/>
+          <p:cNvSpPr txBox="1"/>
+          <p:nvPr/>
+        </p:nvSpPr>
+        <p:spPr>
+          <a:xfrm>
+            <a:off x="5870448" y="1591056"/>
+            <a:ext cx="5751576" cy="256032"/>
+          </a:xfrm>
+          <a:prstGeom prst="rect">
+            <a:avLst/>
+          </a:prstGeom>
+          <a:noFill/>
+        </p:spPr>
+        <p:txBody>
+          <a:bodyPr wrap="square" lIns="0" rIns="0" tIns="0" bIns="0" anchor="t">
+            <a:spAutoFit/>
+          </a:bodyPr>
+          <a:lstStyle/>
+          <a:p>
+            <a:pPr algn="l">
+              <a:spcAft>
+                <a:spcPts val="0"/>
+              </a:spcAft>
+            </a:pPr>
+            <a:r>
+              <a:rPr sz="1350" b="1">
+                <a:solidFill>
+                  <a:srgbClr val="002FA7"/>
+                </a:solidFill>
+                <a:latin typeface="微软雅黑"/>
+                <a:ea typeface="微软雅黑"/>
+                <a:cs typeface="微软雅黑"/>
+              </a:rPr>
+              <a:t>实际数据（ATE Runner）</a:t>
             </a:r>
           </a:p>
         </p:txBody>
       </p:sp>
       <p:pic>
         <p:nvPicPr>
-          <p:cNvPr id="27" name="Picture 26" descr="tps-multi-bench-runner.png"/>
+          <p:cNvPr id="51" name="Picture 50" descr="tps-multi-bench-bom.png"/>
           <p:cNvPicPr>
             <a:picLocks noChangeAspect="1"/>
           </p:cNvPicPr>
           <p:nvPr/>
         </p:nvPicPr>
         <p:blipFill>
-          <a:blip r:embed="rId2"/>
+          <a:blip r:embed="rId8"/>
           <a:stretch>
             <a:fillRect/>
           </a:stretch>
         </p:blipFill>
         <p:spPr>
           <a:xfrm>
-            <a:off x="5870448" y="1956816"/>
-            <a:ext cx="5751576" cy="3450946"/>
+            <a:off x="5870448" y="1847088"/>
+            <a:ext cx="5751576" cy="1828800"/>
           </a:xfrm>
           <a:prstGeom prst="rect">
             <a:avLst/>
           </a:prstGeom>
         </p:spPr>
       </p:pic>
-      <p:sp>
-        <p:nvSpPr>
-          <p:cNvPr id="28" name="Rectangle 27"/>
+      <p:pic>
+        <p:nvPicPr>
+          <p:cNvPr id="52" name="Picture 51" descr="tps-multi-bench-db.png"/>
+          <p:cNvPicPr>
+            <a:picLocks noChangeAspect="1"/>
+          </p:cNvPicPr>
+          <p:nvPr/>
+        </p:nvPicPr>
+        <p:blipFill>
+          <a:blip r:embed="rId9"/>
+          <a:stretch>
+            <a:fillRect/>
+          </a:stretch>
+        </p:blipFill>
+        <p:spPr>
+          <a:xfrm>
+            <a:off x="5870448" y="3785615"/>
+            <a:ext cx="5751576" cy="1828800"/>
+          </a:xfrm>
+          <a:prstGeom prst="rect">
+            <a:avLst/>
+          </a:prstGeom>
+        </p:spPr>
+      </p:pic>
+      <p:sp>
+        <p:nvSpPr>
+          <p:cNvPr id="53" name="Rectangle 52"/>
           <p:cNvSpPr/>
           <p:nvPr/>
         </p:nvSpPr>
         <p:spPr>
           <a:xfrm>
-            <a:off x="5870448" y="5632704"/>
-            <a:ext cx="5751576" cy="1389888"/>
+            <a:off x="5870448" y="5797296"/>
+            <a:ext cx="5751576" cy="457200"/>
           </a:xfrm>
           <a:prstGeom prst="rect">
             <a:avLst/>
@@ -5007,11 +5837,11 @@
           <a:p>
             <a:pPr algn="l">
               <a:spcAft>
-                <a:spcPts val="600"/>
+                <a:spcPts val="300"/>
               </a:spcAft>
             </a:pPr>
             <a:r>
-              <a:rPr sz="1150" b="0">
+              <a:rPr sz="1000" b="0">
                 <a:solidFill>
                   <a:srgbClr val="1A1A1A"/>
                 </a:solidFill>
@@ -5019,25 +5849,7 @@
                 <a:ea typeface="微软雅黑"/>
                 <a:cs typeface="微软雅黑"/>
               </a:rPr>
-              <a:t>测试执行时通过 pytest 将参数传递给测试用例，用例与 GPB 上的设备管理进程建立 gRPC 连接。</a:t>
-            </a:r>
-          </a:p>
-          <a:p>
-            <a:pPr algn="l">
-              <a:spcAft>
-                <a:spcPts val="600"/>
-              </a:spcAft>
-            </a:pPr>
-            <a:r>
-              <a:rPr sz="1150" b="0">
-                <a:solidFill>
-                  <a:srgbClr val="1A1A1A"/>
-                </a:solidFill>
-                <a:latin typeface="微软雅黑"/>
-                <a:ea typeface="微软雅黑"/>
-                <a:cs typeface="微软雅黑"/>
-              </a:rPr>
-              <a:t>这些测试工控机下发的命令，实际都发给了同一个 GPB 上的设备管理服务。</a:t>
+              <a:t>流程：设备 BOM → 工位实例 → pytest 注入参数 → gRPC → 同一 GPB 设备管理服务</a:t>
             </a:r>
           </a:p>
           <a:p>
@@ -5047,7 +5859,7 @@
               </a:spcAft>
             </a:pPr>
             <a:r>
-              <a:rPr sz="1150" b="0">
+              <a:rPr sz="1000" b="0">
                 <a:solidFill>
                   <a:srgbClr val="1A1A1A"/>
                 </a:solidFill>
@@ -5055,7 +5867,7 @@
                 <a:ea typeface="微软雅黑"/>
                 <a:cs typeface="微软雅黑"/>
               </a:rPr>
-              <a:t>由此达成同时支撑多个测试台的目的；对外发布的测试软件只包含 ATE Runner 与通用驱动。</a:t>
+              <a:t>各测试工控机下发的命令，实际都发给了同一个 GPB 上的设备管理服务。</a:t>
             </a:r>
           </a:p>
         </p:txBody>

--- a/docs/一拖多设计.pptx
+++ b/docs/一拖多设计.pptx
@@ -5041,10 +5041,10 @@
           <a:effectLst/>
         </p:spPr>
         <p:txBody>
-          <a:bodyPr rtlCol="0" anchor="ctr" wrap="square" lIns="36576" rIns="36576" tIns="36576" bIns="36576"/>
-          <a:lstStyle/>
-          <a:p>
-            <a:pPr algn="ctr">
+          <a:bodyPr rtlCol="0" anchor="ctr" wrap="square" lIns="54864" rIns="54864" tIns="36576" bIns="36576"/>
+          <a:lstStyle/>
+          <a:p>
+            <a:pPr algn="l">
               <a:spcAft>
                 <a:spcPts val="0"/>
               </a:spcAft>
@@ -5086,10 +5086,10 @@
           <a:effectLst/>
         </p:spPr>
         <p:txBody>
-          <a:bodyPr rtlCol="0" anchor="ctr" wrap="square" lIns="36576" rIns="36576" tIns="36576" bIns="36576"/>
-          <a:lstStyle/>
-          <a:p>
-            <a:pPr algn="ctr">
+          <a:bodyPr rtlCol="0" anchor="ctr" wrap="square" lIns="54864" rIns="54864" tIns="36576" bIns="36576"/>
+          <a:lstStyle/>
+          <a:p>
+            <a:pPr algn="l">
               <a:spcAft>
                 <a:spcPts val="0"/>
               </a:spcAft>
@@ -5756,14 +5756,14 @@
                 <a:ea typeface="微软雅黑"/>
                 <a:cs typeface="微软雅黑"/>
               </a:rPr>
-              <a:t>实际数据（ATE Runner）</a:t>
+              <a:t>一拖多架构</a:t>
             </a:r>
           </a:p>
         </p:txBody>
       </p:sp>
       <p:pic>
         <p:nvPicPr>
-          <p:cNvPr id="51" name="Picture 50" descr="tps-multi-bench-bom.png"/>
+          <p:cNvPr id="51" name="Picture 50" descr="tps-multi-bench-runner.png"/>
           <p:cNvPicPr>
             <a:picLocks noChangeAspect="1"/>
           </p:cNvPicPr>
@@ -5777,48 +5777,24 @@
         </p:blipFill>
         <p:spPr>
           <a:xfrm>
-            <a:off x="5870448" y="1847088"/>
-            <a:ext cx="5751576" cy="1828800"/>
+            <a:off x="5870448" y="1883664"/>
+            <a:ext cx="5751576" cy="3450946"/>
           </a:xfrm>
           <a:prstGeom prst="rect">
             <a:avLst/>
           </a:prstGeom>
         </p:spPr>
       </p:pic>
-      <p:pic>
-        <p:nvPicPr>
-          <p:cNvPr id="52" name="Picture 51" descr="tps-multi-bench-db.png"/>
-          <p:cNvPicPr>
-            <a:picLocks noChangeAspect="1"/>
-          </p:cNvPicPr>
-          <p:nvPr/>
-        </p:nvPicPr>
-        <p:blipFill>
-          <a:blip r:embed="rId9"/>
-          <a:stretch>
-            <a:fillRect/>
-          </a:stretch>
-        </p:blipFill>
-        <p:spPr>
-          <a:xfrm>
-            <a:off x="5870448" y="3785615"/>
-            <a:ext cx="5751576" cy="1828800"/>
-          </a:xfrm>
-          <a:prstGeom prst="rect">
-            <a:avLst/>
-          </a:prstGeom>
-        </p:spPr>
-      </p:pic>
-      <p:sp>
-        <p:nvSpPr>
-          <p:cNvPr id="53" name="Rectangle 52"/>
+      <p:sp>
+        <p:nvSpPr>
+          <p:cNvPr id="52" name="Rectangle 51"/>
           <p:cNvSpPr/>
           <p:nvPr/>
         </p:nvSpPr>
         <p:spPr>
           <a:xfrm>
-            <a:off x="5870448" y="5797296"/>
-            <a:ext cx="5751576" cy="457200"/>
+            <a:off x="5870448" y="5394960"/>
+            <a:ext cx="5751576" cy="877824"/>
           </a:xfrm>
           <a:prstGeom prst="rect">
             <a:avLst/>
@@ -5837,11 +5813,11 @@
           <a:p>
             <a:pPr algn="l">
               <a:spcAft>
-                <a:spcPts val="300"/>
+                <a:spcPts val="500"/>
               </a:spcAft>
             </a:pPr>
             <a:r>
-              <a:rPr sz="1000" b="0">
+              <a:rPr sz="1100" b="0">
                 <a:solidFill>
                   <a:srgbClr val="1A1A1A"/>
                 </a:solidFill>
@@ -5849,7 +5825,25 @@
                 <a:ea typeface="微软雅黑"/>
                 <a:cs typeface="微软雅黑"/>
               </a:rPr>
-              <a:t>流程：设备 BOM → 工位实例 → pytest 注入参数 → gRPC → 同一 GPB 设备管理服务</a:t>
+              <a:t>用例经 pytest 注入通道参数，与 GPB 设备管理进程建立 gRPC 连接</a:t>
+            </a:r>
+          </a:p>
+          <a:p>
+            <a:pPr algn="l">
+              <a:spcAft>
+                <a:spcPts val="500"/>
+              </a:spcAft>
+            </a:pPr>
+            <a:r>
+              <a:rPr sz="1100" b="0">
+                <a:solidFill>
+                  <a:srgbClr val="1A1A1A"/>
+                </a:solidFill>
+                <a:latin typeface="微软雅黑"/>
+                <a:ea typeface="微软雅黑"/>
+                <a:cs typeface="微软雅黑"/>
+              </a:rPr>
+              <a:t>各测试工控机下发的命令，都发给同一个 GPB 设备管理服务</a:t>
             </a:r>
           </a:p>
           <a:p>
@@ -5859,7 +5853,7 @@
               </a:spcAft>
             </a:pPr>
             <a:r>
-              <a:rPr sz="1000" b="0">
+              <a:rPr sz="1100" b="0">
                 <a:solidFill>
                   <a:srgbClr val="1A1A1A"/>
                 </a:solidFill>
@@ -5867,7 +5861,7 @@
                 <a:ea typeface="微软雅黑"/>
                 <a:cs typeface="微软雅黑"/>
               </a:rPr>
-              <a:t>各测试工控机下发的命令，实际都发给了同一个 GPB 上的设备管理服务。</a:t>
+              <a:t>对外发布的软件只含 ATE Runner 与通用驱动，不含内部 .sh 工具</a:t>
             </a:r>
           </a:p>
         </p:txBody>
